--- a/LayCAT_紹介プレゼン.pptx
+++ b/LayCAT_紹介プレゼン.pptx
@@ -15,6 +15,9 @@
     <p:sldId id="263" r:id="rId14"/>
     <p:sldId id="264" r:id="rId15"/>
     <p:sldId id="265" r:id="rId16"/>
+    <p:sldId id="269" r:id="rId20"/>
+    <p:sldId id="270" r:id="rId21"/>
+    <p:sldId id="271" r:id="rId22"/>
     <p:sldId id="266" r:id="rId17"/>
     <p:sldId id="267" r:id="rId18"/>
     <p:sldId id="268" r:id="rId19"/>
@@ -4323,7 +4326,7 @@
                 <a:latin typeface="Meiryo"/>
                 <a:ea typeface="Meiryo"/>
               </a:rPr>
-              <a:t>LayCAT  /  11</a:t>
+              <a:t>LayCAT  /  14</a:t>
             </a:r>
           </a:p>
         </p:txBody>
@@ -5502,6 +5505,1260 @@
                 <a:latin typeface="Meiryo"/>
               </a:rPr>
               <a:t>https://ogshaw03.github.io/laycat/</a:t>
+            </a:r>
+          </a:p>
+        </p:txBody>
+      </p:sp>
+    </p:spTree>
+  </p:cSld>
+  <p:clrMapOvr>
+    <a:masterClrMapping/>
+  </p:clrMapOvr>
+</p:sld>
+</file>
+
+<file path=ppt/slides/slide14.xml><?xml version="1.0" encoding="utf-8"?>
+<p:sld xmlns:a="http://schemas.openxmlformats.org/drawingml/2006/main" xmlns:p="http://schemas.openxmlformats.org/presentationml/2006/main" xmlns:r="http://schemas.openxmlformats.org/officeDocument/2006/relationships">
+  <p:cSld>
+    <p:bg>
+      <p:bgPr>
+        <a:solidFill>
+          <a:srgbClr val="0D0D0F"/>
+        </a:solidFill>
+        <a:effectLst/>
+      </p:bgPr>
+    </p:bg>
+    <p:spTree>
+      <p:nvGrpSpPr>
+        <p:cNvPr id="1" name=""/>
+        <p:cNvGrpSpPr/>
+        <p:nvPr/>
+      </p:nvGrpSpPr>
+      <p:grpSpPr/>
+      <p:sp>
+        <p:nvSpPr>
+          <p:cNvPr id="2" name="Rectangle 1"/>
+          <p:cNvSpPr/>
+          <p:nvPr/>
+        </p:nvSpPr>
+        <p:spPr>
+          <a:xfrm>
+            <a:off x="548640" y="566928"/>
+            <a:ext cx="128016" cy="566928"/>
+          </a:xfrm>
+          <a:prstGeom prst="rect">
+            <a:avLst/>
+          </a:prstGeom>
+          <a:solidFill>
+            <a:srgbClr val="A56BF0"/>
+          </a:solidFill>
+          <a:ln>
+            <a:noFill/>
+          </a:ln>
+          <a:effectLst/>
+        </p:spPr>
+        <p:style>
+          <a:lnRef idx="1">
+            <a:schemeClr val="accent1"/>
+          </a:lnRef>
+          <a:fillRef idx="3">
+            <a:schemeClr val="accent1"/>
+          </a:fillRef>
+          <a:effectRef idx="2">
+            <a:schemeClr val="accent1"/>
+          </a:effectRef>
+          <a:fontRef idx="minor">
+            <a:schemeClr val="lt1"/>
+          </a:fontRef>
+        </p:style>
+        <p:txBody>
+          <a:bodyPr rtlCol="0" anchor="ctr"/>
+          <a:lstStyle/>
+          <a:p>
+            <a:pPr algn="ctr"/>
+          </a:p>
+        </p:txBody>
+      </p:sp>
+      <p:sp>
+        <p:nvSpPr>
+          <p:cNvPr id="3" name="TextBox 2"/>
+          <p:cNvSpPr txBox="1"/>
+          <p:nvPr/>
+        </p:nvSpPr>
+        <p:spPr>
+          <a:xfrm>
+            <a:off x="777240" y="502920"/>
+            <a:ext cx="7315200" cy="365760"/>
+          </a:xfrm>
+          <a:prstGeom prst="rect">
+            <a:avLst/>
+          </a:prstGeom>
+          <a:noFill/>
+        </p:spPr>
+        <p:txBody>
+          <a:bodyPr wrap="square" anchor="t" lIns="0" rIns="0" tIns="0" bIns="0">
+            <a:spAutoFit/>
+          </a:bodyPr>
+          <a:lstStyle/>
+          <a:p>
+            <a:pPr algn="l">
+              <a:lnSpc>
+                <a:spcPct val="106000"/>
+              </a:lnSpc>
+              <a:spcBef>
+                <a:spcPts val="0"/>
+              </a:spcBef>
+              <a:spcAft>
+                <a:spcPts val="200"/>
+              </a:spcAft>
+            </a:pPr>
+            <a:r>
+              <a:rPr sz="1300" b="1">
+                <a:solidFill>
+                  <a:srgbClr val="A56BF0"/>
+                </a:solidFill>
+                <a:latin typeface="Meiryo"/>
+                <a:ea typeface="Meiryo"/>
+              </a:rPr>
+              <a:t>STRENGTH 06 ／ EXR</a:t>
+            </a:r>
+          </a:p>
+        </p:txBody>
+      </p:sp>
+      <p:sp>
+        <p:nvSpPr>
+          <p:cNvPr id="4" name="TextBox 3"/>
+          <p:cNvSpPr txBox="1"/>
+          <p:nvPr/>
+        </p:nvSpPr>
+        <p:spPr>
+          <a:xfrm>
+            <a:off x="777240" y="786384"/>
+            <a:ext cx="10607040" cy="731520"/>
+          </a:xfrm>
+          <a:prstGeom prst="rect">
+            <a:avLst/>
+          </a:prstGeom>
+          <a:noFill/>
+        </p:spPr>
+        <p:txBody>
+          <a:bodyPr wrap="square" anchor="t" lIns="0" rIns="0" tIns="0" bIns="0">
+            <a:spAutoFit/>
+          </a:bodyPr>
+          <a:lstStyle/>
+          <a:p>
+            <a:pPr algn="l">
+              <a:lnSpc>
+                <a:spcPct val="106000"/>
+              </a:lnSpc>
+              <a:spcBef>
+                <a:spcPts val="0"/>
+              </a:spcBef>
+              <a:spcAft>
+                <a:spcPts val="0"/>
+              </a:spcAft>
+            </a:pPr>
+            <a:r>
+              <a:rPr sz="2900" b="1">
+                <a:solidFill>
+                  <a:srgbClr val="F2F3F7"/>
+                </a:solidFill>
+                <a:latin typeface="Meiryo"/>
+                <a:ea typeface="Meiryo"/>
+              </a:rPr>
+              <a:t>EXR：Nuke なしで多層 EXR をブラウザで直接プレビュー</a:t>
+            </a:r>
+          </a:p>
+        </p:txBody>
+      </p:sp>
+      <p:sp>
+        <p:nvSpPr>
+          <p:cNvPr id="5" name="TextBox 4"/>
+          <p:cNvSpPr txBox="1"/>
+          <p:nvPr/>
+        </p:nvSpPr>
+        <p:spPr>
+          <a:xfrm>
+            <a:off x="777240" y="1783080"/>
+            <a:ext cx="10607040" cy="4206240"/>
+          </a:xfrm>
+          <a:prstGeom prst="rect">
+            <a:avLst/>
+          </a:prstGeom>
+          <a:noFill/>
+        </p:spPr>
+        <p:txBody>
+          <a:bodyPr wrap="square" anchor="t" lIns="0" rIns="0" tIns="0" bIns="0">
+            <a:spAutoFit/>
+          </a:bodyPr>
+          <a:lstStyle/>
+          <a:p>
+            <a:pPr algn="l">
+              <a:lnSpc>
+                <a:spcPct val="112000"/>
+              </a:lnSpc>
+              <a:spcBef>
+                <a:spcPts val="0"/>
+              </a:spcBef>
+              <a:spcAft>
+                <a:spcPts val="1300"/>
+              </a:spcAft>
+            </a:pPr>
+            <a:r>
+              <a:rPr sz="1450" b="1">
+                <a:solidFill>
+                  <a:srgbClr val="5A9BFF"/>
+                </a:solidFill>
+                <a:latin typeface="Meiryo"/>
+                <a:ea typeface="Meiryo"/>
+              </a:rPr>
+              <a:t>●  </a:t>
+            </a:r>
+            <a:r>
+              <a:rPr sz="1450" b="0">
+                <a:solidFill>
+                  <a:srgbClr val="F2F3F7"/>
+                </a:solidFill>
+                <a:latin typeface="Meiryo"/>
+                <a:ea typeface="Meiryo"/>
+              </a:rPr>
+              <a:t>独自 EXR パーサをブラウザに実装。CG レンダー中間ファイル（.exr）を、変換なしで直接開けます。</a:t>
+            </a:r>
+          </a:p>
+          <a:p>
+            <a:pPr algn="l">
+              <a:lnSpc>
+                <a:spcPct val="112000"/>
+              </a:lnSpc>
+              <a:spcBef>
+                <a:spcPts val="0"/>
+              </a:spcBef>
+              <a:spcAft>
+                <a:spcPts val="1300"/>
+              </a:spcAft>
+            </a:pPr>
+            <a:r>
+              <a:rPr sz="1450" b="1">
+                <a:solidFill>
+                  <a:srgbClr val="5A9BFF"/>
+                </a:solidFill>
+                <a:latin typeface="Meiryo"/>
+                <a:ea typeface="Meiryo"/>
+              </a:rPr>
+              <a:t>●  </a:t>
+            </a:r>
+            <a:r>
+              <a:rPr sz="1450" b="0">
+                <a:solidFill>
+                  <a:srgbClr val="F2F3F7"/>
+                </a:solidFill>
+                <a:latin typeface="Meiryo"/>
+                <a:ea typeface="Meiryo"/>
+              </a:rPr>
+              <a:t>28 レイヤー・98 チャンネル級の巨大 EXR（Nuke／Arnold／Redshift／V-Ray 書き出し）にも対応。</a:t>
+            </a:r>
+          </a:p>
+          <a:p>
+            <a:pPr algn="l">
+              <a:lnSpc>
+                <a:spcPct val="112000"/>
+              </a:lnSpc>
+              <a:spcBef>
+                <a:spcPts val="0"/>
+              </a:spcBef>
+              <a:spcAft>
+                <a:spcPts val="1300"/>
+              </a:spcAft>
+            </a:pPr>
+            <a:r>
+              <a:rPr sz="1450" b="1">
+                <a:solidFill>
+                  <a:srgbClr val="5A9BFF"/>
+                </a:solidFill>
+                <a:latin typeface="Meiryo"/>
+                <a:ea typeface="Meiryo"/>
+              </a:rPr>
+              <a:t>●  </a:t>
+            </a:r>
+            <a:r>
+              <a:rPr sz="1450" b="0">
+                <a:solidFill>
+                  <a:srgbClr val="F2F3F7"/>
+                </a:solidFill>
+                <a:latin typeface="Meiryo"/>
+                <a:ea typeface="Meiryo"/>
+              </a:rPr>
+              <a:t>露出（EV）／ガンマ／Depth 黒白点／反転を、その場でスライダ or 数値入力で調整。</a:t>
+            </a:r>
+          </a:p>
+          <a:p>
+            <a:pPr algn="l">
+              <a:lnSpc>
+                <a:spcPct val="112000"/>
+              </a:lnSpc>
+              <a:spcBef>
+                <a:spcPts val="0"/>
+              </a:spcBef>
+              <a:spcAft>
+                <a:spcPts val="1300"/>
+              </a:spcAft>
+            </a:pPr>
+            <a:r>
+              <a:rPr sz="1450" b="1">
+                <a:solidFill>
+                  <a:srgbClr val="5A9BFF"/>
+                </a:solidFill>
+                <a:latin typeface="Meiryo"/>
+                <a:ea typeface="Meiryo"/>
+              </a:rPr>
+              <a:t>●  </a:t>
+            </a:r>
+            <a:r>
+              <a:rPr sz="1450" b="0">
+                <a:solidFill>
+                  <a:srgbClr val="F2F3F7"/>
+                </a:solidFill>
+                <a:latin typeface="Meiryo"/>
+                <a:ea typeface="Meiryo"/>
+              </a:rPr>
+              <a:t>選択レイヤーはアノテウィンドウ内で即切替 → そのまま描画・コメントに焼き込み。</a:t>
+            </a:r>
+          </a:p>
+          <a:p>
+            <a:pPr algn="l">
+              <a:lnSpc>
+                <a:spcPct val="112000"/>
+              </a:lnSpc>
+              <a:spcBef>
+                <a:spcPts val="0"/>
+              </a:spcBef>
+              <a:spcAft>
+                <a:spcPts val="1300"/>
+              </a:spcAft>
+            </a:pPr>
+            <a:r>
+              <a:rPr sz="1450" b="1">
+                <a:solidFill>
+                  <a:srgbClr val="5A9BFF"/>
+                </a:solidFill>
+                <a:latin typeface="Meiryo"/>
+                <a:ea typeface="Meiryo"/>
+              </a:rPr>
+              <a:t>●  </a:t>
+            </a:r>
+            <a:r>
+              <a:rPr sz="1450" b="0">
+                <a:solidFill>
+                  <a:srgbClr val="F2F3F7"/>
+                </a:solidFill>
+                <a:latin typeface="Meiryo"/>
+                <a:ea typeface="Meiryo"/>
+              </a:rPr>
+              <a:t>CG チームが監督に「変換した JPEG」ではなく「オリジナルの .exr」を送れる、業界唯一級のワークフロー。</a:t>
+            </a:r>
+          </a:p>
+        </p:txBody>
+      </p:sp>
+      <p:sp>
+        <p:nvSpPr>
+          <p:cNvPr id="7" name="TextBox 6"/>
+          <p:cNvSpPr txBox="1"/>
+          <p:nvPr/>
+        </p:nvSpPr>
+        <p:spPr>
+          <a:xfrm>
+            <a:off x="10881360" y="6455664"/>
+            <a:ext cx="1097280" cy="274320"/>
+          </a:xfrm>
+          <a:prstGeom prst="rect">
+            <a:avLst/>
+          </a:prstGeom>
+          <a:noFill/>
+        </p:spPr>
+        <p:txBody>
+          <a:bodyPr wrap="square" anchor="t" lIns="0" rIns="0" tIns="0" bIns="0">
+            <a:spAutoFit/>
+          </a:bodyPr>
+          <a:lstStyle/>
+          <a:p>
+            <a:pPr algn="r">
+              <a:lnSpc>
+                <a:spcPct val="106000"/>
+              </a:lnSpc>
+              <a:spcBef>
+                <a:spcPts val="0"/>
+              </a:spcBef>
+              <a:spcAft>
+                <a:spcPts val="600"/>
+              </a:spcAft>
+            </a:pPr>
+            <a:r>
+              <a:rPr sz="900" b="0">
+                <a:solidFill>
+                  <a:srgbClr val="9A9AAA"/>
+                </a:solidFill>
+                <a:latin typeface="Meiryo"/>
+                <a:ea typeface="Meiryo"/>
+              </a:rPr>
+              <a:t>LayCAT  /  11</a:t>
+            </a:r>
+          </a:p>
+        </p:txBody>
+      </p:sp>
+    </p:spTree>
+  </p:cSld>
+  <p:clrMapOvr>
+    <a:masterClrMapping/>
+  </p:clrMapOvr>
+</p:sld>
+</file>
+
+<file path=ppt/slides/slide15.xml><?xml version="1.0" encoding="utf-8"?>
+<p:sld xmlns:a="http://schemas.openxmlformats.org/drawingml/2006/main" xmlns:p="http://schemas.openxmlformats.org/presentationml/2006/main" xmlns:r="http://schemas.openxmlformats.org/officeDocument/2006/relationships">
+  <p:cSld>
+    <p:bg>
+      <p:bgPr>
+        <a:solidFill>
+          <a:srgbClr val="0D0D0F"/>
+        </a:solidFill>
+        <a:effectLst/>
+      </p:bgPr>
+    </p:bg>
+    <p:spTree>
+      <p:nvGrpSpPr>
+        <p:cNvPr id="1" name=""/>
+        <p:cNvGrpSpPr/>
+        <p:nvPr/>
+      </p:nvGrpSpPr>
+      <p:grpSpPr/>
+      <p:sp>
+        <p:nvSpPr>
+          <p:cNvPr id="2" name="Rectangle 1"/>
+          <p:cNvSpPr/>
+          <p:nvPr/>
+        </p:nvSpPr>
+        <p:spPr>
+          <a:xfrm>
+            <a:off x="548640" y="566928"/>
+            <a:ext cx="128016" cy="566928"/>
+          </a:xfrm>
+          <a:prstGeom prst="rect">
+            <a:avLst/>
+          </a:prstGeom>
+          <a:solidFill>
+            <a:srgbClr val="A56BF0"/>
+          </a:solidFill>
+          <a:ln>
+            <a:noFill/>
+          </a:ln>
+          <a:effectLst/>
+        </p:spPr>
+        <p:style>
+          <a:lnRef idx="1">
+            <a:schemeClr val="accent1"/>
+          </a:lnRef>
+          <a:fillRef idx="3">
+            <a:schemeClr val="accent1"/>
+          </a:fillRef>
+          <a:effectRef idx="2">
+            <a:schemeClr val="accent1"/>
+          </a:effectRef>
+          <a:fontRef idx="minor">
+            <a:schemeClr val="lt1"/>
+          </a:fontRef>
+        </p:style>
+        <p:txBody>
+          <a:bodyPr rtlCol="0" anchor="ctr"/>
+          <a:lstStyle/>
+          <a:p>
+            <a:pPr algn="ctr"/>
+          </a:p>
+        </p:txBody>
+      </p:sp>
+      <p:sp>
+        <p:nvSpPr>
+          <p:cNvPr id="3" name="TextBox 2"/>
+          <p:cNvSpPr txBox="1"/>
+          <p:nvPr/>
+        </p:nvSpPr>
+        <p:spPr>
+          <a:xfrm>
+            <a:off x="777240" y="502920"/>
+            <a:ext cx="7315200" cy="365760"/>
+          </a:xfrm>
+          <a:prstGeom prst="rect">
+            <a:avLst/>
+          </a:prstGeom>
+          <a:noFill/>
+        </p:spPr>
+        <p:txBody>
+          <a:bodyPr wrap="square" anchor="t" lIns="0" rIns="0" tIns="0" bIns="0">
+            <a:spAutoFit/>
+          </a:bodyPr>
+          <a:lstStyle/>
+          <a:p>
+            <a:pPr algn="l">
+              <a:lnSpc>
+                <a:spcPct val="106000"/>
+              </a:lnSpc>
+              <a:spcBef>
+                <a:spcPts val="0"/>
+              </a:spcBef>
+              <a:spcAft>
+                <a:spcPts val="200"/>
+              </a:spcAft>
+            </a:pPr>
+            <a:r>
+              <a:rPr sz="1300" b="1">
+                <a:solidFill>
+                  <a:srgbClr val="A56BF0"/>
+                </a:solidFill>
+                <a:latin typeface="Meiryo"/>
+                <a:ea typeface="Meiryo"/>
+              </a:rPr>
+              <a:t>STRENGTH 06 ／ EXR</a:t>
+            </a:r>
+          </a:p>
+        </p:txBody>
+      </p:sp>
+      <p:sp>
+        <p:nvSpPr>
+          <p:cNvPr id="4" name="TextBox 3"/>
+          <p:cNvSpPr txBox="1"/>
+          <p:nvPr/>
+        </p:nvSpPr>
+        <p:spPr>
+          <a:xfrm>
+            <a:off x="777240" y="786384"/>
+            <a:ext cx="10607040" cy="731520"/>
+          </a:xfrm>
+          <a:prstGeom prst="rect">
+            <a:avLst/>
+          </a:prstGeom>
+          <a:noFill/>
+        </p:spPr>
+        <p:txBody>
+          <a:bodyPr wrap="square" anchor="t" lIns="0" rIns="0" tIns="0" bIns="0">
+            <a:spAutoFit/>
+          </a:bodyPr>
+          <a:lstStyle/>
+          <a:p>
+            <a:pPr algn="l">
+              <a:lnSpc>
+                <a:spcPct val="106000"/>
+              </a:lnSpc>
+              <a:spcBef>
+                <a:spcPts val="0"/>
+              </a:spcBef>
+              <a:spcAft>
+                <a:spcPts val="0"/>
+              </a:spcAft>
+            </a:pPr>
+            <a:r>
+              <a:rPr sz="2900" b="1">
+                <a:solidFill>
+                  <a:srgbClr val="F2F3F7"/>
+                </a:solidFill>
+                <a:latin typeface="Meiryo"/>
+                <a:ea typeface="Meiryo"/>
+              </a:rPr>
+              <a:t>あらゆる AOV レイヤーを自動判定して可視化</a:t>
+            </a:r>
+          </a:p>
+        </p:txBody>
+      </p:sp>
+      <p:sp>
+        <p:nvSpPr>
+          <p:cNvPr id="5" name="TextBox 4"/>
+          <p:cNvSpPr txBox="1"/>
+          <p:nvPr/>
+        </p:nvSpPr>
+        <p:spPr>
+          <a:xfrm>
+            <a:off x="777240" y="1783080"/>
+            <a:ext cx="10607040" cy="4206240"/>
+          </a:xfrm>
+          <a:prstGeom prst="rect">
+            <a:avLst/>
+          </a:prstGeom>
+          <a:noFill/>
+        </p:spPr>
+        <p:txBody>
+          <a:bodyPr wrap="square" anchor="t" lIns="0" rIns="0" tIns="0" bIns="0">
+            <a:spAutoFit/>
+          </a:bodyPr>
+          <a:lstStyle/>
+          <a:p>
+            <a:pPr algn="l">
+              <a:lnSpc>
+                <a:spcPct val="112000"/>
+              </a:lnSpc>
+              <a:spcBef>
+                <a:spcPts val="0"/>
+              </a:spcBef>
+              <a:spcAft>
+                <a:spcPts val="1300"/>
+              </a:spcAft>
+            </a:pPr>
+            <a:r>
+              <a:rPr sz="1450" b="1">
+                <a:solidFill>
+                  <a:srgbClr val="5A9BFF"/>
+                </a:solidFill>
+                <a:latin typeface="Meiryo"/>
+                <a:ea typeface="Meiryo"/>
+              </a:rPr>
+              <a:t>●  </a:t>
+            </a:r>
+            <a:r>
+              <a:rPr sz="1450" b="0">
+                <a:solidFill>
+                  <a:srgbClr val="F2F3F7"/>
+                </a:solidFill>
+                <a:latin typeface="Meiryo"/>
+                <a:ea typeface="Meiryo"/>
+              </a:rPr>
+              <a:t>Beauty（RGB）／ Depth（黒白点・反転付き）／ Normal（XYZ → カラー）</a:t>
+            </a:r>
+          </a:p>
+          <a:p>
+            <a:pPr algn="l">
+              <a:lnSpc>
+                <a:spcPct val="112000"/>
+              </a:lnSpc>
+              <a:spcBef>
+                <a:spcPts val="0"/>
+              </a:spcBef>
+              <a:spcAft>
+                <a:spcPts val="1300"/>
+              </a:spcAft>
+            </a:pPr>
+            <a:r>
+              <a:rPr sz="1450" b="1">
+                <a:solidFill>
+                  <a:srgbClr val="5A9BFF"/>
+                </a:solidFill>
+                <a:latin typeface="Meiryo"/>
+                <a:ea typeface="Meiryo"/>
+              </a:rPr>
+              <a:t>●  </a:t>
+            </a:r>
+            <a:r>
+              <a:rPr sz="1450" b="0">
+                <a:solidFill>
+                  <a:srgbClr val="F2F3F7"/>
+                </a:solidFill>
+                <a:latin typeface="Meiryo"/>
+                <a:ea typeface="Meiryo"/>
+              </a:rPr>
+              <a:t>Motion Vector（角度 → 色相、強度 → 彩度で 2D ベクトルを直感表示）</a:t>
+            </a:r>
+          </a:p>
+          <a:p>
+            <a:pPr algn="l">
+              <a:lnSpc>
+                <a:spcPct val="112000"/>
+              </a:lnSpc>
+              <a:spcBef>
+                <a:spcPts val="0"/>
+              </a:spcBef>
+              <a:spcAft>
+                <a:spcPts val="1300"/>
+              </a:spcAft>
+            </a:pPr>
+            <a:r>
+              <a:rPr sz="1450" b="1">
+                <a:solidFill>
+                  <a:srgbClr val="5A9BFF"/>
+                </a:solidFill>
+                <a:latin typeface="Meiryo"/>
+                <a:ea typeface="Meiryo"/>
+              </a:rPr>
+              <a:t>●  </a:t>
+            </a:r>
+            <a:r>
+              <a:rPr sz="1450" b="0">
+                <a:solidFill>
+                  <a:srgbClr val="F2F3F7"/>
+                </a:solidFill>
+                <a:latin typeface="Meiryo"/>
+                <a:ea typeface="Meiryo"/>
+              </a:rPr>
+              <a:t>UV パス（R=U, G=V）／ Position パス（bbox 正規化 → RGB）</a:t>
+            </a:r>
+          </a:p>
+          <a:p>
+            <a:pPr algn="l">
+              <a:lnSpc>
+                <a:spcPct val="112000"/>
+              </a:lnSpc>
+              <a:spcBef>
+                <a:spcPts val="0"/>
+              </a:spcBef>
+              <a:spcAft>
+                <a:spcPts val="1300"/>
+              </a:spcAft>
+            </a:pPr>
+            <a:r>
+              <a:rPr sz="1450" b="1">
+                <a:solidFill>
+                  <a:srgbClr val="5A9BFF"/>
+                </a:solidFill>
+                <a:latin typeface="Meiryo"/>
+                <a:ea typeface="Meiryo"/>
+              </a:rPr>
+              <a:t>●  </a:t>
+            </a:r>
+            <a:r>
+              <a:rPr sz="1450" b="0">
+                <a:solidFill>
+                  <a:srgbClr val="F2F3F7"/>
+                </a:solidFill>
+                <a:latin typeface="Meiryo"/>
+                <a:ea typeface="Meiryo"/>
+              </a:rPr>
+              <a:t>Cryptomatte 対応：ID ハッシュを 24bit 色に変換してモザイク表示（プレビュー &amp; ランク両方）</a:t>
+            </a:r>
+          </a:p>
+          <a:p>
+            <a:pPr algn="l">
+              <a:lnSpc>
+                <a:spcPct val="112000"/>
+              </a:lnSpc>
+              <a:spcBef>
+                <a:spcPts val="0"/>
+              </a:spcBef>
+              <a:spcAft>
+                <a:spcPts val="1300"/>
+              </a:spcAft>
+            </a:pPr>
+            <a:r>
+              <a:rPr sz="1450" b="1">
+                <a:solidFill>
+                  <a:srgbClr val="5A9BFF"/>
+                </a:solidFill>
+                <a:latin typeface="Meiryo"/>
+                <a:ea typeface="Meiryo"/>
+              </a:rPr>
+              <a:t>●  </a:t>
+            </a:r>
+            <a:r>
+              <a:rPr sz="1450" b="0">
+                <a:solidFill>
+                  <a:srgbClr val="F2F3F7"/>
+                </a:solidFill>
+                <a:latin typeface="Meiryo"/>
+                <a:ea typeface="Meiryo"/>
+              </a:rPr>
+              <a:t>「🎨 全レイヤー」モーダルで全レイヤーをタイル俯瞰、クリックで直接開く</a:t>
+            </a:r>
+          </a:p>
+          <a:p>
+            <a:pPr algn="l">
+              <a:lnSpc>
+                <a:spcPct val="112000"/>
+              </a:lnSpc>
+              <a:spcBef>
+                <a:spcPts val="0"/>
+              </a:spcBef>
+              <a:spcAft>
+                <a:spcPts val="1300"/>
+              </a:spcAft>
+            </a:pPr>
+            <a:r>
+              <a:rPr sz="1450" b="1">
+                <a:solidFill>
+                  <a:srgbClr val="5A9BFF"/>
+                </a:solidFill>
+                <a:latin typeface="Meiryo"/>
+                <a:ea typeface="Meiryo"/>
+              </a:rPr>
+              <a:t>●  </a:t>
+            </a:r>
+            <a:r>
+              <a:rPr sz="1450" b="0">
+                <a:solidFill>
+                  <a:srgbClr val="F2F3F7"/>
+                </a:solidFill>
+                <a:latin typeface="Meiryo"/>
+                <a:ea typeface="Meiryo"/>
+              </a:rPr>
+              <a:t>SyncSketch・Frame.io など既存 Web レビューツールにはない機能。</a:t>
+            </a:r>
+          </a:p>
+        </p:txBody>
+      </p:sp>
+      <p:sp>
+        <p:nvSpPr>
+          <p:cNvPr id="7" name="TextBox 6"/>
+          <p:cNvSpPr txBox="1"/>
+          <p:nvPr/>
+        </p:nvSpPr>
+        <p:spPr>
+          <a:xfrm>
+            <a:off x="10881360" y="6455664"/>
+            <a:ext cx="1097280" cy="274320"/>
+          </a:xfrm>
+          <a:prstGeom prst="rect">
+            <a:avLst/>
+          </a:prstGeom>
+          <a:noFill/>
+        </p:spPr>
+        <p:txBody>
+          <a:bodyPr wrap="square" anchor="t" lIns="0" rIns="0" tIns="0" bIns="0">
+            <a:spAutoFit/>
+          </a:bodyPr>
+          <a:lstStyle/>
+          <a:p>
+            <a:pPr algn="r">
+              <a:lnSpc>
+                <a:spcPct val="106000"/>
+              </a:lnSpc>
+              <a:spcBef>
+                <a:spcPts val="0"/>
+              </a:spcBef>
+              <a:spcAft>
+                <a:spcPts val="600"/>
+              </a:spcAft>
+            </a:pPr>
+            <a:r>
+              <a:rPr sz="900" b="0">
+                <a:solidFill>
+                  <a:srgbClr val="9A9AAA"/>
+                </a:solidFill>
+                <a:latin typeface="Meiryo"/>
+                <a:ea typeface="Meiryo"/>
+              </a:rPr>
+              <a:t>LayCAT  /  12</a:t>
+            </a:r>
+          </a:p>
+        </p:txBody>
+      </p:sp>
+    </p:spTree>
+  </p:cSld>
+  <p:clrMapOvr>
+    <a:masterClrMapping/>
+  </p:clrMapOvr>
+</p:sld>
+</file>
+
+<file path=ppt/slides/slide16.xml><?xml version="1.0" encoding="utf-8"?>
+<p:sld xmlns:a="http://schemas.openxmlformats.org/drawingml/2006/main" xmlns:p="http://schemas.openxmlformats.org/presentationml/2006/main" xmlns:r="http://schemas.openxmlformats.org/officeDocument/2006/relationships">
+  <p:cSld>
+    <p:bg>
+      <p:bgPr>
+        <a:solidFill>
+          <a:srgbClr val="0D0D0F"/>
+        </a:solidFill>
+        <a:effectLst/>
+      </p:bgPr>
+    </p:bg>
+    <p:spTree>
+      <p:nvGrpSpPr>
+        <p:cNvPr id="1" name=""/>
+        <p:cNvGrpSpPr/>
+        <p:nvPr/>
+      </p:nvGrpSpPr>
+      <p:grpSpPr/>
+      <p:sp>
+        <p:nvSpPr>
+          <p:cNvPr id="2" name="Rectangle 1"/>
+          <p:cNvSpPr/>
+          <p:nvPr/>
+        </p:nvSpPr>
+        <p:spPr>
+          <a:xfrm>
+            <a:off x="548640" y="566928"/>
+            <a:ext cx="128016" cy="566928"/>
+          </a:xfrm>
+          <a:prstGeom prst="rect">
+            <a:avLst/>
+          </a:prstGeom>
+          <a:solidFill>
+            <a:srgbClr val="A56BF0"/>
+          </a:solidFill>
+          <a:ln>
+            <a:noFill/>
+          </a:ln>
+          <a:effectLst/>
+        </p:spPr>
+        <p:style>
+          <a:lnRef idx="1">
+            <a:schemeClr val="accent1"/>
+          </a:lnRef>
+          <a:fillRef idx="3">
+            <a:schemeClr val="accent1"/>
+          </a:fillRef>
+          <a:effectRef idx="2">
+            <a:schemeClr val="accent1"/>
+          </a:effectRef>
+          <a:fontRef idx="minor">
+            <a:schemeClr val="lt1"/>
+          </a:fontRef>
+        </p:style>
+        <p:txBody>
+          <a:bodyPr rtlCol="0" anchor="ctr"/>
+          <a:lstStyle/>
+          <a:p>
+            <a:pPr algn="ctr"/>
+          </a:p>
+        </p:txBody>
+      </p:sp>
+      <p:sp>
+        <p:nvSpPr>
+          <p:cNvPr id="3" name="TextBox 2"/>
+          <p:cNvSpPr txBox="1"/>
+          <p:nvPr/>
+        </p:nvSpPr>
+        <p:spPr>
+          <a:xfrm>
+            <a:off x="777240" y="502920"/>
+            <a:ext cx="7315200" cy="365760"/>
+          </a:xfrm>
+          <a:prstGeom prst="rect">
+            <a:avLst/>
+          </a:prstGeom>
+          <a:noFill/>
+        </p:spPr>
+        <p:txBody>
+          <a:bodyPr wrap="square" anchor="t" lIns="0" rIns="0" tIns="0" bIns="0">
+            <a:spAutoFit/>
+          </a:bodyPr>
+          <a:lstStyle/>
+          <a:p>
+            <a:pPr algn="l">
+              <a:lnSpc>
+                <a:spcPct val="106000"/>
+              </a:lnSpc>
+              <a:spcBef>
+                <a:spcPts val="0"/>
+              </a:spcBef>
+              <a:spcAft>
+                <a:spcPts val="200"/>
+              </a:spcAft>
+            </a:pPr>
+            <a:r>
+              <a:rPr sz="1300" b="1">
+                <a:solidFill>
+                  <a:srgbClr val="A56BF0"/>
+                </a:solidFill>
+                <a:latin typeface="Meiryo"/>
+                <a:ea typeface="Meiryo"/>
+              </a:rPr>
+              <a:t>STRENGTH 07 ／ CLOUD</a:t>
+            </a:r>
+          </a:p>
+        </p:txBody>
+      </p:sp>
+      <p:sp>
+        <p:nvSpPr>
+          <p:cNvPr id="4" name="TextBox 3"/>
+          <p:cNvSpPr txBox="1"/>
+          <p:nvPr/>
+        </p:nvSpPr>
+        <p:spPr>
+          <a:xfrm>
+            <a:off x="777240" y="786384"/>
+            <a:ext cx="10607040" cy="731520"/>
+          </a:xfrm>
+          <a:prstGeom prst="rect">
+            <a:avLst/>
+          </a:prstGeom>
+          <a:noFill/>
+        </p:spPr>
+        <p:txBody>
+          <a:bodyPr wrap="square" anchor="t" lIns="0" rIns="0" tIns="0" bIns="0">
+            <a:spAutoFit/>
+          </a:bodyPr>
+          <a:lstStyle/>
+          <a:p>
+            <a:pPr algn="l">
+              <a:lnSpc>
+                <a:spcPct val="106000"/>
+              </a:lnSpc>
+              <a:spcBef>
+                <a:spcPts val="0"/>
+              </a:spcBef>
+              <a:spcAft>
+                <a:spcPts val="0"/>
+              </a:spcAft>
+            </a:pPr>
+            <a:r>
+              <a:rPr sz="2900" b="1">
+                <a:solidFill>
+                  <a:srgbClr val="F2F3F7"/>
+                </a:solidFill>
+                <a:latin typeface="Meiryo"/>
+                <a:ea typeface="Meiryo"/>
+              </a:rPr>
+              <a:t>Cloudflare R2 対応：フォルダ運用からクラウド運用へ</a:t>
+            </a:r>
+          </a:p>
+        </p:txBody>
+      </p:sp>
+      <p:sp>
+        <p:nvSpPr>
+          <p:cNvPr id="5" name="TextBox 4"/>
+          <p:cNvSpPr txBox="1"/>
+          <p:nvPr/>
+        </p:nvSpPr>
+        <p:spPr>
+          <a:xfrm>
+            <a:off x="777240" y="1783080"/>
+            <a:ext cx="10607040" cy="4206240"/>
+          </a:xfrm>
+          <a:prstGeom prst="rect">
+            <a:avLst/>
+          </a:prstGeom>
+          <a:noFill/>
+        </p:spPr>
+        <p:txBody>
+          <a:bodyPr wrap="square" anchor="t" lIns="0" rIns="0" tIns="0" bIns="0">
+            <a:spAutoFit/>
+          </a:bodyPr>
+          <a:lstStyle/>
+          <a:p>
+            <a:pPr algn="l">
+              <a:lnSpc>
+                <a:spcPct val="112000"/>
+              </a:lnSpc>
+              <a:spcBef>
+                <a:spcPts val="0"/>
+              </a:spcBef>
+              <a:spcAft>
+                <a:spcPts val="1300"/>
+              </a:spcAft>
+            </a:pPr>
+            <a:r>
+              <a:rPr sz="1450" b="1">
+                <a:solidFill>
+                  <a:srgbClr val="5A9BFF"/>
+                </a:solidFill>
+                <a:latin typeface="Meiryo"/>
+                <a:ea typeface="Meiryo"/>
+              </a:rPr>
+              <a:t>●  </a:t>
+            </a:r>
+            <a:r>
+              <a:rPr sz="1450" b="0">
+                <a:solidFill>
+                  <a:srgbClr val="F2F3F7"/>
+                </a:solidFill>
+                <a:latin typeface="Meiryo"/>
+                <a:ea typeface="Meiryo"/>
+              </a:rPr>
+              <a:t>プロジェクトデータをクラウド保存（Cloudflare R2 バケット経由）。従来のローカルフォルダ運用と併用可能。</a:t>
+            </a:r>
+          </a:p>
+          <a:p>
+            <a:pPr algn="l">
+              <a:lnSpc>
+                <a:spcPct val="112000"/>
+              </a:lnSpc>
+              <a:spcBef>
+                <a:spcPts val="0"/>
+              </a:spcBef>
+              <a:spcAft>
+                <a:spcPts val="1300"/>
+              </a:spcAft>
+            </a:pPr>
+            <a:r>
+              <a:rPr sz="1450" b="1">
+                <a:solidFill>
+                  <a:srgbClr val="5A9BFF"/>
+                </a:solidFill>
+                <a:latin typeface="Meiryo"/>
+                <a:ea typeface="Meiryo"/>
+              </a:rPr>
+              <a:t>●  </a:t>
+            </a:r>
+            <a:r>
+              <a:rPr sz="1450" b="0">
+                <a:solidFill>
+                  <a:srgbClr val="F2F3F7"/>
+                </a:solidFill>
+                <a:latin typeface="Meiryo"/>
+                <a:ea typeface="Meiryo"/>
+              </a:rPr>
+              <a:t>参加可能なプロジェクトはホーム画面のタイル一覧から即接続。招待・共有もプロジェクト ID で完結。</a:t>
+            </a:r>
+          </a:p>
+          <a:p>
+            <a:pPr algn="l">
+              <a:lnSpc>
+                <a:spcPct val="112000"/>
+              </a:lnSpc>
+              <a:spcBef>
+                <a:spcPts val="0"/>
+              </a:spcBef>
+              <a:spcAft>
+                <a:spcPts val="1300"/>
+              </a:spcAft>
+            </a:pPr>
+            <a:r>
+              <a:rPr sz="1450" b="1">
+                <a:solidFill>
+                  <a:srgbClr val="5A9BFF"/>
+                </a:solidFill>
+                <a:latin typeface="Meiryo"/>
+                <a:ea typeface="Meiryo"/>
+              </a:rPr>
+              <a:t>●  </a:t>
+            </a:r>
+            <a:r>
+              <a:rPr sz="1450" b="0">
+                <a:solidFill>
+                  <a:srgbClr val="F2F3F7"/>
+                </a:solidFill>
+                <a:latin typeface="Meiryo"/>
+                <a:ea typeface="Meiryo"/>
+              </a:rPr>
+              <a:t>メンバー方式アクセス制御：owner + members に登録された人だけがアクセス可能（Worker で判定）。</a:t>
+            </a:r>
+          </a:p>
+          <a:p>
+            <a:pPr algn="l">
+              <a:lnSpc>
+                <a:spcPct val="112000"/>
+              </a:lnSpc>
+              <a:spcBef>
+                <a:spcPts val="0"/>
+              </a:spcBef>
+              <a:spcAft>
+                <a:spcPts val="1300"/>
+              </a:spcAft>
+            </a:pPr>
+            <a:r>
+              <a:rPr sz="1450" b="1">
+                <a:solidFill>
+                  <a:srgbClr val="5A9BFF"/>
+                </a:solidFill>
+                <a:latin typeface="Meiryo"/>
+                <a:ea typeface="Meiryo"/>
+              </a:rPr>
+              <a:t>●  </a:t>
+            </a:r>
+            <a:r>
+              <a:rPr sz="1450" b="0">
+                <a:solidFill>
+                  <a:srgbClr val="F2F3F7"/>
+                </a:solidFill>
+                <a:latin typeface="Meiryo"/>
+                <a:ea typeface="Meiryo"/>
+              </a:rPr>
+              <a:t>Firebase 認証と連携し、ログイン中ユーザーの本人性を毎リクエスト検証。</a:t>
+            </a:r>
+          </a:p>
+          <a:p>
+            <a:pPr algn="l">
+              <a:lnSpc>
+                <a:spcPct val="112000"/>
+              </a:lnSpc>
+              <a:spcBef>
+                <a:spcPts val="0"/>
+              </a:spcBef>
+              <a:spcAft>
+                <a:spcPts val="1300"/>
+              </a:spcAft>
+            </a:pPr>
+            <a:r>
+              <a:rPr sz="1450" b="1">
+                <a:solidFill>
+                  <a:srgbClr val="5A9BFF"/>
+                </a:solidFill>
+                <a:latin typeface="Meiryo"/>
+                <a:ea typeface="Meiryo"/>
+              </a:rPr>
+              <a:t>●  </a:t>
+            </a:r>
+            <a:r>
+              <a:rPr sz="1450" b="0">
+                <a:solidFill>
+                  <a:srgbClr val="F2F3F7"/>
+                </a:solidFill>
+                <a:latin typeface="Meiryo"/>
+                <a:ea typeface="Meiryo"/>
+              </a:rPr>
+              <a:t>ファイルサイズ上限（JSON 10MB / メディア 500MB）＋ 監査ログで安全運用。</a:t>
+            </a:r>
+          </a:p>
+          <a:p>
+            <a:pPr algn="l">
+              <a:lnSpc>
+                <a:spcPct val="112000"/>
+              </a:lnSpc>
+              <a:spcBef>
+                <a:spcPts val="0"/>
+              </a:spcBef>
+              <a:spcAft>
+                <a:spcPts val="1300"/>
+              </a:spcAft>
+            </a:pPr>
+            <a:r>
+              <a:rPr sz="1450" b="1">
+                <a:solidFill>
+                  <a:srgbClr val="5A9BFF"/>
+                </a:solidFill>
+                <a:latin typeface="Meiryo"/>
+                <a:ea typeface="Meiryo"/>
+              </a:rPr>
+              <a:t>●  </a:t>
+            </a:r>
+            <a:r>
+              <a:rPr sz="1450" b="0">
+                <a:solidFill>
+                  <a:srgbClr val="F2F3F7"/>
+                </a:solidFill>
+                <a:latin typeface="Meiryo"/>
+                <a:ea typeface="Meiryo"/>
+              </a:rPr>
+              <a:t>導入・撤退が自由：既存のフォルダ運用プロジェクトとは完全に独立。</a:t>
+            </a:r>
+          </a:p>
+        </p:txBody>
+      </p:sp>
+      <p:sp>
+        <p:nvSpPr>
+          <p:cNvPr id="7" name="TextBox 6"/>
+          <p:cNvSpPr txBox="1"/>
+          <p:nvPr/>
+        </p:nvSpPr>
+        <p:spPr>
+          <a:xfrm>
+            <a:off x="10881360" y="6455664"/>
+            <a:ext cx="1097280" cy="274320"/>
+          </a:xfrm>
+          <a:prstGeom prst="rect">
+            <a:avLst/>
+          </a:prstGeom>
+          <a:noFill/>
+        </p:spPr>
+        <p:txBody>
+          <a:bodyPr wrap="square" anchor="t" lIns="0" rIns="0" tIns="0" bIns="0">
+            <a:spAutoFit/>
+          </a:bodyPr>
+          <a:lstStyle/>
+          <a:p>
+            <a:pPr algn="r">
+              <a:lnSpc>
+                <a:spcPct val="106000"/>
+              </a:lnSpc>
+              <a:spcBef>
+                <a:spcPts val="0"/>
+              </a:spcBef>
+              <a:spcAft>
+                <a:spcPts val="600"/>
+              </a:spcAft>
+            </a:pPr>
+            <a:r>
+              <a:rPr sz="900" b="0">
+                <a:solidFill>
+                  <a:srgbClr val="9A9AAA"/>
+                </a:solidFill>
+                <a:latin typeface="Meiryo"/>
+                <a:ea typeface="Meiryo"/>
+              </a:rPr>
+              <a:t>LayCAT  /  13</a:t>
             </a:r>
           </a:p>
         </p:txBody>

--- a/LayCAT_紹介プレゼン.pptx
+++ b/LayCAT_紹介プレゼン.pptx
@@ -5854,7 +5854,7 @@
                 <a:latin typeface="Meiryo"/>
                 <a:ea typeface="Meiryo"/>
               </a:rPr>
-              <a:t>CG チームが監督に「変換した JPEG」ではなく「オリジナルの .exr」を送れる、業界唯一級のワークフロー。</a:t>
+              <a:t>CG チームは追加の書き出し作業なしで、レンダー完了直後の .exr をそのまま監督・PD に送れます。</a:t>
             </a:r>
           </a:p>
         </p:txBody>
@@ -6283,7 +6283,7 @@
                 <a:latin typeface="Meiryo"/>
                 <a:ea typeface="Meiryo"/>
               </a:rPr>
-              <a:t>SyncSketch・Frame.io など既存 Web レビューツールにはない機能。</a:t>
+              <a:t>いずれもドロップダウンから即切替、露出・ガンマもその場で調整可能。</a:t>
             </a:r>
           </a:p>
         </p:txBody>

--- a/LayCAT_紹介プレゼン.pptx
+++ b/LayCAT_紹介プレゼン.pptx
@@ -6076,7 +6076,7 @@
         <p:spPr>
           <a:xfrm>
             <a:off x="777240" y="1783080"/>
-            <a:ext cx="10607040" cy="4206240"/>
+            <a:ext cx="4400000" cy="4206240"/>
           </a:xfrm>
           <a:prstGeom prst="rect">
             <a:avLst/>
@@ -6288,6 +6288,35 @@
           </a:p>
         </p:txBody>
       </p:sp>
+      <p:pic>
+        <p:nvPicPr>
+          <p:cNvPr id="90" name="Picture 13" descr="exr_alllayers.png"/>
+          <p:cNvPicPr>
+            <a:picLocks noChangeAspect="1"/>
+          </p:cNvPicPr>
+          <p:nvPr/>
+        </p:nvPicPr>
+        <p:blipFill>
+          <a:blip r:embed="rId3"/>
+          <a:stretch>
+            <a:fillRect/>
+          </a:stretch>
+        </p:blipFill>
+        <p:spPr>
+          <a:xfrm>
+            <a:off x="5400000" y="1700000"/>
+            <a:ext cx="6600000" cy="4600000"/>
+          </a:xfrm>
+          <a:prstGeom prst="rect">
+            <a:avLst/>
+          </a:prstGeom>
+          <a:ln w="12700">
+            <a:solidFill>
+              <a:srgbClr val="2A2C34"/>
+            </a:solidFill>
+          </a:ln>
+        </p:spPr>
+      </p:pic>
       <p:sp>
         <p:nvSpPr>
           <p:cNvPr id="7" name="TextBox 6"/>
@@ -6505,7 +6534,7 @@
         <p:spPr>
           <a:xfrm>
             <a:off x="777240" y="1783080"/>
-            <a:ext cx="10607040" cy="4206240"/>
+            <a:ext cx="10607040" cy="1200000"/>
           </a:xfrm>
           <a:prstGeom prst="rect">
             <a:avLst/>
@@ -6526,7 +6555,7 @@
                 <a:spcPts val="0"/>
               </a:spcBef>
               <a:spcAft>
-                <a:spcPts val="1300"/>
+                <a:spcPts val="800"/>
               </a:spcAft>
             </a:pPr>
             <a:r>
@@ -6547,7 +6576,7 @@
                 <a:latin typeface="Meiryo"/>
                 <a:ea typeface="Meiryo"/>
               </a:rPr>
-              <a:t>プロジェクトデータをクラウド保存（Cloudflare R2 バケット経由）。従来のローカルフォルダ運用と併用可能。</a:t>
+              <a:t>プロジェクトデータをクラウド保存。ホーム画面のタイル一覧から参加中プロジェクトに即接続。</a:t>
             </a:r>
           </a:p>
           <a:p>
@@ -6559,7 +6588,7 @@
                 <a:spcPts val="0"/>
               </a:spcBef>
               <a:spcAft>
-                <a:spcPts val="1300"/>
+                <a:spcPts val="800"/>
               </a:spcAft>
             </a:pPr>
             <a:r>
@@ -6580,7 +6609,7 @@
                 <a:latin typeface="Meiryo"/>
                 <a:ea typeface="Meiryo"/>
               </a:rPr>
-              <a:t>参加可能なプロジェクトはホーム画面のタイル一覧から即接続。招待・共有もプロジェクト ID で完結。</a:t>
+              <a:t>メンバー方式アクセス制御：所属メンバー以外は Cloudflare Worker で 403 返却。</a:t>
             </a:r>
           </a:p>
           <a:p>
@@ -6592,7 +6621,7 @@
                 <a:spcPts val="0"/>
               </a:spcBef>
               <a:spcAft>
-                <a:spcPts val="1300"/>
+                <a:spcPts val="800"/>
               </a:spcAft>
             </a:pPr>
             <a:r>
@@ -6613,110 +6642,40 @@
                 <a:latin typeface="Meiryo"/>
                 <a:ea typeface="Meiryo"/>
               </a:rPr>
-              <a:t>メンバー方式アクセス制御：owner + members に登録された人だけがアクセス可能（Worker で判定）。</a:t>
-            </a:r>
-          </a:p>
-          <a:p>
-            <a:pPr algn="l">
-              <a:lnSpc>
-                <a:spcPct val="112000"/>
-              </a:lnSpc>
-              <a:spcBef>
-                <a:spcPts val="0"/>
-              </a:spcBef>
-              <a:spcAft>
-                <a:spcPts val="1300"/>
-              </a:spcAft>
-            </a:pPr>
-            <a:r>
-              <a:rPr sz="1450" b="1">
-                <a:solidFill>
-                  <a:srgbClr val="5A9BFF"/>
-                </a:solidFill>
-                <a:latin typeface="Meiryo"/>
-                <a:ea typeface="Meiryo"/>
-              </a:rPr>
-              <a:t>●  </a:t>
-            </a:r>
-            <a:r>
-              <a:rPr sz="1450" b="0">
-                <a:solidFill>
-                  <a:srgbClr val="F2F3F7"/>
-                </a:solidFill>
-                <a:latin typeface="Meiryo"/>
-                <a:ea typeface="Meiryo"/>
-              </a:rPr>
-              <a:t>Firebase 認証と連携し、ログイン中ユーザーの本人性を毎リクエスト検証。</a:t>
-            </a:r>
-          </a:p>
-          <a:p>
-            <a:pPr algn="l">
-              <a:lnSpc>
-                <a:spcPct val="112000"/>
-              </a:lnSpc>
-              <a:spcBef>
-                <a:spcPts val="0"/>
-              </a:spcBef>
-              <a:spcAft>
-                <a:spcPts val="1300"/>
-              </a:spcAft>
-            </a:pPr>
-            <a:r>
-              <a:rPr sz="1450" b="1">
-                <a:solidFill>
-                  <a:srgbClr val="5A9BFF"/>
-                </a:solidFill>
-                <a:latin typeface="Meiryo"/>
-                <a:ea typeface="Meiryo"/>
-              </a:rPr>
-              <a:t>●  </a:t>
-            </a:r>
-            <a:r>
-              <a:rPr sz="1450" b="0">
-                <a:solidFill>
-                  <a:srgbClr val="F2F3F7"/>
-                </a:solidFill>
-                <a:latin typeface="Meiryo"/>
-                <a:ea typeface="Meiryo"/>
-              </a:rPr>
-              <a:t>ファイルサイズ上限（JSON 10MB / メディア 500MB）＋ 監査ログで安全運用。</a:t>
-            </a:r>
-          </a:p>
-          <a:p>
-            <a:pPr algn="l">
-              <a:lnSpc>
-                <a:spcPct val="112000"/>
-              </a:lnSpc>
-              <a:spcBef>
-                <a:spcPts val="0"/>
-              </a:spcBef>
-              <a:spcAft>
-                <a:spcPts val="1300"/>
-              </a:spcAft>
-            </a:pPr>
-            <a:r>
-              <a:rPr sz="1450" b="1">
-                <a:solidFill>
-                  <a:srgbClr val="5A9BFF"/>
-                </a:solidFill>
-                <a:latin typeface="Meiryo"/>
-                <a:ea typeface="Meiryo"/>
-              </a:rPr>
-              <a:t>●  </a:t>
-            </a:r>
-            <a:r>
-              <a:rPr sz="1450" b="0">
-                <a:solidFill>
-                  <a:srgbClr val="F2F3F7"/>
-                </a:solidFill>
-                <a:latin typeface="Meiryo"/>
-                <a:ea typeface="Meiryo"/>
-              </a:rPr>
-              <a:t>導入・撤退が自由：既存のフォルダ運用プロジェクトとは完全に独立。</a:t>
-            </a:r>
-          </a:p>
-        </p:txBody>
-      </p:sp>
+              <a:t>ファイルサイズ上限＋監査ログで安全運用。従来のフォルダ運用と併用可能。</a:t>
+            </a:r>
+          </a:p>
+        </p:txBody>
+      </p:sp>
+      <p:pic>
+        <p:nvPicPr>
+          <p:cNvPr id="90" name="Picture 14" descr="r2_architecture.png"/>
+          <p:cNvPicPr>
+            <a:picLocks noChangeAspect="1"/>
+          </p:cNvPicPr>
+          <p:nvPr/>
+        </p:nvPicPr>
+        <p:blipFill>
+          <a:blip r:embed="rId3"/>
+          <a:stretch>
+            <a:fillRect/>
+          </a:stretch>
+        </p:blipFill>
+        <p:spPr>
+          <a:xfrm>
+            <a:off x="777240" y="3100000"/>
+            <a:ext cx="10607040" cy="3300000"/>
+          </a:xfrm>
+          <a:prstGeom prst="rect">
+            <a:avLst/>
+          </a:prstGeom>
+          <a:ln w="12700">
+            <a:solidFill>
+              <a:srgbClr val="2A2C34"/>
+            </a:solidFill>
+          </a:ln>
+        </p:spPr>
+      </p:pic>
       <p:sp>
         <p:nvSpPr>
           <p:cNvPr id="7" name="TextBox 6"/>

--- a/LayCAT_紹介プレゼン.pptx
+++ b/LayCAT_紹介プレゼン.pptx
@@ -5701,7 +5701,7 @@
                 <a:spcPts val="0"/>
               </a:spcBef>
               <a:spcAft>
-                <a:spcPts val="1300"/>
+                <a:spcPts val="1000"/>
               </a:spcAft>
             </a:pPr>
             <a:r>
@@ -5722,7 +5722,7 @@
                 <a:latin typeface="Meiryo"/>
                 <a:ea typeface="Meiryo"/>
               </a:rPr>
-              <a:t>独自 EXR パーサをブラウザに実装。CG レンダー中間ファイル（.exr）を、変換なしで直接開けます。</a:t>
+              <a:t>CG レンダーの中間ファイル（.exr）を、専用ビューアなしでブラウザから直接プレビューできます。</a:t>
             </a:r>
           </a:p>
           <a:p>
@@ -5734,7 +5734,7 @@
                 <a:spcPts val="0"/>
               </a:spcBef>
               <a:spcAft>
-                <a:spcPts val="1300"/>
+                <a:spcPts val="1000"/>
               </a:spcAft>
             </a:pPr>
             <a:r>
@@ -5755,7 +5755,7 @@
                 <a:latin typeface="Meiryo"/>
                 <a:ea typeface="Meiryo"/>
               </a:rPr>
-              <a:t>28 レイヤー・98 チャンネル級の巨大 EXR（Nuke／Arnold／Redshift／V-Ray 書き出し）にも対応。</a:t>
+              <a:t>多数のレイヤー（AOV）を含む多層 EXR にも対応。Nuke／Arnold／Redshift／V-Ray いずれの書き出しでも読み込み可能。</a:t>
             </a:r>
           </a:p>
           <a:p>
@@ -5767,7 +5767,7 @@
                 <a:spcPts val="0"/>
               </a:spcBef>
               <a:spcAft>
-                <a:spcPts val="1300"/>
+                <a:spcPts val="1000"/>
               </a:spcAft>
             </a:pPr>
             <a:r>
@@ -5788,7 +5788,7 @@
                 <a:latin typeface="Meiryo"/>
                 <a:ea typeface="Meiryo"/>
               </a:rPr>
-              <a:t>露出（EV）／ガンマ／Depth 黒白点／反転を、その場でスライダ or 数値入力で調整。</a:t>
+              <a:t>露出（EV）／ガンマ／Depth の黒白点／反転を、その場でスライダや数値入力で調整。</a:t>
             </a:r>
           </a:p>
           <a:p>
@@ -5800,7 +5800,7 @@
                 <a:spcPts val="0"/>
               </a:spcBef>
               <a:spcAft>
-                <a:spcPts val="1300"/>
+                <a:spcPts val="1000"/>
               </a:spcAft>
             </a:pPr>
             <a:r>
@@ -5821,7 +5821,7 @@
                 <a:latin typeface="Meiryo"/>
                 <a:ea typeface="Meiryo"/>
               </a:rPr>
-              <a:t>選択レイヤーはアノテウィンドウ内で即切替 → そのまま描画・コメントに焼き込み。</a:t>
+              <a:t>見たいレイヤーはドロップダウンで即切替。そのままフレームコメントやアノテーションを描き込めます。</a:t>
             </a:r>
           </a:p>
           <a:p>
@@ -5833,7 +5833,7 @@
                 <a:spcPts val="0"/>
               </a:spcBef>
               <a:spcAft>
-                <a:spcPts val="1300"/>
+                <a:spcPts val="1000"/>
               </a:spcAft>
             </a:pPr>
             <a:r>
@@ -5854,7 +5854,7 @@
                 <a:latin typeface="Meiryo"/>
                 <a:ea typeface="Meiryo"/>
               </a:rPr>
-              <a:t>CG チームは追加の書き出し作業なしで、レンダー完了直後の .exr をそのまま監督・PD に送れます。</a:t>
+              <a:t>書き出し直後の .exr をそのまま監督・PD に共有できるので、CG チームの手戻りが減ります。</a:t>
             </a:r>
           </a:p>
         </p:txBody>
@@ -6097,7 +6097,7 @@
                 <a:spcPts val="0"/>
               </a:spcBef>
               <a:spcAft>
-                <a:spcPts val="1300"/>
+                <a:spcPts val="1000"/>
               </a:spcAft>
             </a:pPr>
             <a:r>
@@ -6118,7 +6118,7 @@
                 <a:latin typeface="Meiryo"/>
                 <a:ea typeface="Meiryo"/>
               </a:rPr>
-              <a:t>Beauty（RGB）／ Depth（黒白点・反転付き）／ Normal（XYZ → カラー）</a:t>
+              <a:t>Beauty（RGB）／ Depth（黒白点・反転付き）／ Normal（XYZ）を自動判定。</a:t>
             </a:r>
           </a:p>
           <a:p>
@@ -6130,7 +6130,7 @@
                 <a:spcPts val="0"/>
               </a:spcBef>
               <a:spcAft>
-                <a:spcPts val="1300"/>
+                <a:spcPts val="1000"/>
               </a:spcAft>
             </a:pPr>
             <a:r>
@@ -6151,7 +6151,7 @@
                 <a:latin typeface="Meiryo"/>
                 <a:ea typeface="Meiryo"/>
               </a:rPr>
-              <a:t>Motion Vector（角度 → 色相、強度 → 彩度で 2D ベクトルを直感表示）</a:t>
+              <a:t>Motion Vector（動きの向き）／ UV パス／ Position パスも対応。</a:t>
             </a:r>
           </a:p>
           <a:p>
@@ -6163,7 +6163,7 @@
                 <a:spcPts val="0"/>
               </a:spcBef>
               <a:spcAft>
-                <a:spcPts val="1300"/>
+                <a:spcPts val="1000"/>
               </a:spcAft>
             </a:pPr>
             <a:r>
@@ -6184,7 +6184,7 @@
                 <a:latin typeface="Meiryo"/>
                 <a:ea typeface="Meiryo"/>
               </a:rPr>
-              <a:t>UV パス（R=U, G=V）／ Position パス（bbox 正規化 → RGB）</a:t>
+              <a:t>Cryptomatte（オブジェクト／アセット分離）にも対応。プレビュー &amp; ランク両方描画。</a:t>
             </a:r>
           </a:p>
           <a:p>
@@ -6196,7 +6196,7 @@
                 <a:spcPts val="0"/>
               </a:spcBef>
               <a:spcAft>
-                <a:spcPts val="1300"/>
+                <a:spcPts val="1000"/>
               </a:spcAft>
             </a:pPr>
             <a:r>
@@ -6217,73 +6217,7 @@
                 <a:latin typeface="Meiryo"/>
                 <a:ea typeface="Meiryo"/>
               </a:rPr>
-              <a:t>Cryptomatte 対応：ID ハッシュを 24bit 色に変換してモザイク表示（プレビュー &amp; ランク両方）</a:t>
-            </a:r>
-          </a:p>
-          <a:p>
-            <a:pPr algn="l">
-              <a:lnSpc>
-                <a:spcPct val="112000"/>
-              </a:lnSpc>
-              <a:spcBef>
-                <a:spcPts val="0"/>
-              </a:spcBef>
-              <a:spcAft>
-                <a:spcPts val="1300"/>
-              </a:spcAft>
-            </a:pPr>
-            <a:r>
-              <a:rPr sz="1450" b="1">
-                <a:solidFill>
-                  <a:srgbClr val="5A9BFF"/>
-                </a:solidFill>
-                <a:latin typeface="Meiryo"/>
-                <a:ea typeface="Meiryo"/>
-              </a:rPr>
-              <a:t>●  </a:t>
-            </a:r>
-            <a:r>
-              <a:rPr sz="1450" b="0">
-                <a:solidFill>
-                  <a:srgbClr val="F2F3F7"/>
-                </a:solidFill>
-                <a:latin typeface="Meiryo"/>
-                <a:ea typeface="Meiryo"/>
-              </a:rPr>
-              <a:t>「🎨 全レイヤー」モーダルで全レイヤーをタイル俯瞰、クリックで直接開く</a:t>
-            </a:r>
-          </a:p>
-          <a:p>
-            <a:pPr algn="l">
-              <a:lnSpc>
-                <a:spcPct val="112000"/>
-              </a:lnSpc>
-              <a:spcBef>
-                <a:spcPts val="0"/>
-              </a:spcBef>
-              <a:spcAft>
-                <a:spcPts val="1300"/>
-              </a:spcAft>
-            </a:pPr>
-            <a:r>
-              <a:rPr sz="1450" b="1">
-                <a:solidFill>
-                  <a:srgbClr val="5A9BFF"/>
-                </a:solidFill>
-                <a:latin typeface="Meiryo"/>
-                <a:ea typeface="Meiryo"/>
-              </a:rPr>
-              <a:t>●  </a:t>
-            </a:r>
-            <a:r>
-              <a:rPr sz="1450" b="0">
-                <a:solidFill>
-                  <a:srgbClr val="F2F3F7"/>
-                </a:solidFill>
-                <a:latin typeface="Meiryo"/>
-                <a:ea typeface="Meiryo"/>
-              </a:rPr>
-              <a:t>いずれもドロップダウンから即切替、露出・ガンマもその場で調整可能。</a:t>
+              <a:t>「🎨 全レイヤー」モーダルで、含まれる全レイヤーをタイル一覧で把握。</a:t>
             </a:r>
           </a:p>
         </p:txBody>
@@ -6555,7 +6489,7 @@
                 <a:spcPts val="0"/>
               </a:spcBef>
               <a:spcAft>
-                <a:spcPts val="800"/>
+                <a:spcPts val="1000"/>
               </a:spcAft>
             </a:pPr>
             <a:r>
@@ -6576,7 +6510,7 @@
                 <a:latin typeface="Meiryo"/>
                 <a:ea typeface="Meiryo"/>
               </a:rPr>
-              <a:t>プロジェクトデータをクラウド保存。ホーム画面のタイル一覧から参加中プロジェクトに即接続。</a:t>
+              <a:t>プロジェクトデータをクラウドストレージ（Cloudflare R2）に保存。ホーム画面のタイル一覧から即接続。</a:t>
             </a:r>
           </a:p>
           <a:p>
@@ -6588,7 +6522,7 @@
                 <a:spcPts val="0"/>
               </a:spcBef>
               <a:spcAft>
-                <a:spcPts val="800"/>
+                <a:spcPts val="1000"/>
               </a:spcAft>
             </a:pPr>
             <a:r>
@@ -6609,7 +6543,7 @@
                 <a:latin typeface="Meiryo"/>
                 <a:ea typeface="Meiryo"/>
               </a:rPr>
-              <a:t>メンバー方式アクセス制御：所属メンバー以外は Cloudflare Worker で 403 返却。</a:t>
+              <a:t>受付係（Worker）が招待メンバーかどうかを毎回チェックし、部外者は自動的にアクセス拒否。</a:t>
             </a:r>
           </a:p>
           <a:p>
@@ -6621,7 +6555,7 @@
                 <a:spcPts val="0"/>
               </a:spcBef>
               <a:spcAft>
-                <a:spcPts val="800"/>
+                <a:spcPts val="1000"/>
               </a:spcAft>
             </a:pPr>
             <a:r>
@@ -6642,7 +6576,7 @@
                 <a:latin typeface="Meiryo"/>
                 <a:ea typeface="Meiryo"/>
               </a:rPr>
-              <a:t>ファイルサイズ上限＋監査ログで安全運用。従来のフォルダ運用と併用可能。</a:t>
+              <a:t>ファイルサイズ制限＋アクセス履歴で安全運用。従来のフォルダ共有と併用可能。</a:t>
             </a:r>
           </a:p>
         </p:txBody>

--- a/LayCAT_紹介プレゼン.pptx
+++ b/LayCAT_紹介プレゼン.pptx
@@ -5680,7 +5680,7 @@
         <p:spPr>
           <a:xfrm>
             <a:off x="777240" y="1783080"/>
-            <a:ext cx="10607040" cy="4206240"/>
+            <a:ext cx="4400000" cy="4206240"/>
           </a:xfrm>
           <a:prstGeom prst="rect">
             <a:avLst/>
@@ -5859,6 +5859,35 @@
           </a:p>
         </p:txBody>
       </p:sp>
+      <p:pic>
+        <p:nvPicPr>
+          <p:cNvPr id="90" name="Picture 15" descr="exr_anno_crypto.png"/>
+          <p:cNvPicPr>
+            <a:picLocks noChangeAspect="1"/>
+          </p:cNvPicPr>
+          <p:nvPr/>
+        </p:nvPicPr>
+        <p:blipFill>
+          <a:blip r:embed="rId3"/>
+          <a:stretch>
+            <a:fillRect/>
+          </a:stretch>
+        </p:blipFill>
+        <p:spPr>
+          <a:xfrm>
+            <a:off x="5250000" y="1900000"/>
+            <a:ext cx="6800000" cy="3825000"/>
+          </a:xfrm>
+          <a:prstGeom prst="rect">
+            <a:avLst/>
+          </a:prstGeom>
+          <a:ln w="12700">
+            <a:solidFill>
+              <a:srgbClr val="2A2C34"/>
+            </a:solidFill>
+          </a:ln>
+        </p:spPr>
+      </p:pic>
       <p:sp>
         <p:nvSpPr>
           <p:cNvPr id="7" name="TextBox 6"/>
@@ -6062,7 +6091,7 @@
                 <a:latin typeface="Meiryo"/>
                 <a:ea typeface="Meiryo"/>
               </a:rPr>
-              <a:t>あらゆる AOV レイヤーを自動判定して可視化</a:t>
+              <a:t>あらゆる AOV レイヤーを自動判定して可視化＋タイル一覧表示</a:t>
             </a:r>
           </a:p>
         </p:txBody>
@@ -6238,8 +6267,8 @@
         </p:blipFill>
         <p:spPr>
           <a:xfrm>
-            <a:off x="5400000" y="1700000"/>
-            <a:ext cx="6600000" cy="4600000"/>
+            <a:off x="5250000" y="1900000"/>
+            <a:ext cx="6800000" cy="3825000"/>
           </a:xfrm>
           <a:prstGeom prst="rect">
             <a:avLst/>
@@ -6597,8 +6626,8 @@
         </p:blipFill>
         <p:spPr>
           <a:xfrm>
-            <a:off x="777240" y="3100000"/>
-            <a:ext cx="10607040" cy="3300000"/>
+            <a:off x="2310959" y="2400000"/>
+            <a:ext cx="7569777" cy="4258000"/>
           </a:xfrm>
           <a:prstGeom prst="rect">
             <a:avLst/>

--- a/LayCAT_紹介プレゼン.pptx
+++ b/LayCAT_紹介プレゼン.pptx
@@ -5447,8 +5447,8 @@
         </p:nvSpPr>
         <p:spPr>
           <a:xfrm>
-            <a:off x="914400" y="4268507"/>
-            <a:ext cx="10360152" cy="822960"/>
+            <a:off x="914400" y="3900000"/>
+            <a:ext cx="10360152" cy="1900000"/>
           </a:xfrm>
           <a:prstGeom prst="rect">
             <a:avLst/>
@@ -5461,15 +5461,71 @@
           </a:bodyPr>
           <a:lstStyle/>
           <a:p>
-            <a:pPr algn="ctr"/>
-            <a:r>
-              <a:rPr sz="2400" b="1">
+            <a:pPr algn="ctr">
+              <a:spcAft>
+                <a:spcPts val="600"/>
+              </a:spcAft>
+            </a:pPr>
+            <a:r>
+              <a:rPr sz="2800" b="1">
                 <a:solidFill>
                   <a:srgbClr val="F2F3F7"/>
                 </a:solidFill>
                 <a:latin typeface="Meiryo"/>
-              </a:rPr>
-              <a:t>ご清聴ありがとうございました</a:t>
+                <a:ea typeface="Meiryo"/>
+              </a:rPr>
+              <a:t>「もう少し右」を、絵で伝える。</a:t>
+            </a:r>
+          </a:p>
+          <a:p>
+            <a:pPr algn="ctr">
+              <a:spcAft>
+                <a:spcPts val="200"/>
+              </a:spcAft>
+            </a:pPr>
+            <a:r>
+              <a:rPr sz="1600" b="0">
+                <a:solidFill>
+                  <a:srgbClr val="C7C7CF"/>
+                </a:solidFill>
+                <a:latin typeface="Meiryo"/>
+                <a:ea typeface="Meiryo"/>
+              </a:rPr>
+              <a:t>動画レビュー・EXR プレビュー・進捗管理・クラウド共有——</a:t>
+            </a:r>
+          </a:p>
+          <a:p>
+            <a:pPr algn="ctr">
+              <a:spcAft>
+                <a:spcPts val="800"/>
+              </a:spcAft>
+            </a:pPr>
+            <a:r>
+              <a:rPr sz="2000" b="1">
+                <a:solidFill>
+                  <a:srgbClr val="5A9BFF"/>
+                </a:solidFill>
+                <a:latin typeface="Meiryo"/>
+                <a:ea typeface="Meiryo"/>
+              </a:rPr>
+              <a:t>現場の"面倒"を、ブラウザ 1 つに。</a:t>
+            </a:r>
+          </a:p>
+          <a:p>
+            <a:pPr algn="ctr">
+              <a:spcAft>
+                <a:spcPts val="0"/>
+              </a:spcAft>
+            </a:pPr>
+            <a:r>
+              <a:rPr sz="1200" b="0">
+                <a:solidFill>
+                  <a:srgbClr val="9A9AAA"/>
+                </a:solidFill>
+                <a:latin typeface="Meiryo"/>
+                <a:ea typeface="Meiryo"/>
+              </a:rPr>
+              <a:t>今日から、あなたの現場で。ありがとうございました。</a:t>
             </a:r>
           </a:p>
         </p:txBody>

--- a/LayCAT_紹介プレゼン.pptx
+++ b/LayCAT_紹介プレゼン.pptx
@@ -5463,7 +5463,7 @@
           <a:p>
             <a:pPr algn="ctr">
               <a:spcAft>
-                <a:spcPts val="600"/>
+                <a:spcPts val="700"/>
               </a:spcAft>
             </a:pPr>
             <a:r>
@@ -5480,7 +5480,7 @@
           <a:p>
             <a:pPr algn="ctr">
               <a:spcAft>
-                <a:spcPts val="200"/>
+                <a:spcPts val="700"/>
               </a:spcAft>
             </a:pPr>
             <a:r>
@@ -5491,41 +5491,24 @@
                 <a:latin typeface="Meiryo"/>
                 <a:ea typeface="Meiryo"/>
               </a:rPr>
-              <a:t>動画レビュー・EXR プレビュー・進捗管理・クラウド共有——</a:t>
+              <a:t>動画レビュー・EXR・進捗管理、ぜんぶブラウザ 1 つで。</a:t>
             </a:r>
           </a:p>
           <a:p>
             <a:pPr algn="ctr">
               <a:spcAft>
-                <a:spcPts val="800"/>
-              </a:spcAft>
-            </a:pPr>
-            <a:r>
-              <a:rPr sz="2000" b="1">
+                <a:spcPts val="0"/>
+              </a:spcAft>
+            </a:pPr>
+            <a:r>
+              <a:rPr sz="2200" b="1">
                 <a:solidFill>
                   <a:srgbClr val="5A9BFF"/>
                 </a:solidFill>
                 <a:latin typeface="Meiryo"/>
                 <a:ea typeface="Meiryo"/>
               </a:rPr>
-              <a:t>現場の"面倒"を、ブラウザ 1 つに。</a:t>
-            </a:r>
-          </a:p>
-          <a:p>
-            <a:pPr algn="ctr">
-              <a:spcAft>
-                <a:spcPts val="0"/>
-              </a:spcAft>
-            </a:pPr>
-            <a:r>
-              <a:rPr sz="1200" b="0">
-                <a:solidFill>
-                  <a:srgbClr val="9A9AAA"/>
-                </a:solidFill>
-                <a:latin typeface="Meiryo"/>
-                <a:ea typeface="Meiryo"/>
-              </a:rPr>
-              <a:t>今日から、あなたの現場で。ありがとうございました。</a:t>
+              <a:t>LayCAT が、現場のやりとりを軽くします。</a:t>
             </a:r>
           </a:p>
         </p:txBody>

--- a/LayCAT_紹介プレゼン.pptx
+++ b/LayCAT_紹介プレゼン.pptx
@@ -16199,7 +16199,7 @@
                 <a:cs typeface="Meiryo"/>
                 <a:sym typeface="Meiryo"/>
               </a:rPr>
-              <a:t>「もう少し右」を、絵で伝える。</a:t>
+              <a:t>「ここ、こうして」が、すぐ伝わる。</a:t>
             </a:r>
             <a:endParaRPr/>
           </a:p>
@@ -16223,7 +16223,7 @@
                 <a:cs typeface="Meiryo"/>
                 <a:sym typeface="Meiryo"/>
               </a:rPr>
-              <a:t>動画レビュー・EXR プレビュー・進捗管理・クラウド共有——</a:t>
+              <a:t>描く・見る・共有。ブラウザ 1 つで。</a:t>
             </a:r>
             <a:endParaRPr/>
           </a:p>
@@ -16247,7 +16247,7 @@
                 <a:cs typeface="Meiryo"/>
                 <a:sym typeface="Meiryo"/>
               </a:rPr>
-              <a:t>現場の"面倒"を、ブラウザ 1 つに。</a:t>
+              <a:t>LayCAT が、現場のやりとりを軽くします。</a:t>
             </a:r>
             <a:endParaRPr/>
           </a:p>
@@ -16271,7 +16271,7 @@
                 <a:cs typeface="Meiryo"/>
                 <a:sym typeface="Meiryo"/>
               </a:rPr>
-              <a:t>今日から、あなたの現場で。ありがとうございました。</a:t>
+              <a:t/>
             </a:r>
             <a:endParaRPr/>
           </a:p>
